--- a/prolog/prolog_intro.pptx
+++ b/prolog/prolog_intro.pptx
@@ -136,7 +136,7 @@
   <pc:docChgLst>
     <pc:chgData name="Toby Donaldson" userId="2e6e5431-bb17-4c41-9985-d39c50d83c73" providerId="ADAL" clId="{F31BC264-820E-54C4-A6D1-F92AF9CC222E}"/>
     <pc:docChg chg="undo custSel addSld delSld modSld sldOrd">
-      <pc:chgData name="Toby Donaldson" userId="2e6e5431-bb17-4c41-9985-d39c50d83c73" providerId="ADAL" clId="{F31BC264-820E-54C4-A6D1-F92AF9CC222E}" dt="2026-08-04T22:27:50.790" v="1773" actId="20577"/>
+      <pc:chgData name="Toby Donaldson" userId="2e6e5431-bb17-4c41-9985-d39c50d83c73" providerId="ADAL" clId="{F31BC264-820E-54C4-A6D1-F92AF9CC222E}" dt="2026-08-04T22:59:43.965" v="1850" actId="5793"/>
       <pc:docMkLst>
         <pc:docMk/>
       </pc:docMkLst>
@@ -434,7 +434,7 @@
         </pc:sldMkLst>
       </pc:sldChg>
       <pc:sldChg chg="addSp delSp modSp mod">
-        <pc:chgData name="Toby Donaldson" userId="2e6e5431-bb17-4c41-9985-d39c50d83c73" providerId="ADAL" clId="{F31BC264-820E-54C4-A6D1-F92AF9CC222E}" dt="2026-08-04T22:14:51.687" v="577" actId="1076"/>
+        <pc:chgData name="Toby Donaldson" userId="2e6e5431-bb17-4c41-9985-d39c50d83c73" providerId="ADAL" clId="{F31BC264-820E-54C4-A6D1-F92AF9CC222E}" dt="2026-08-04T22:53:51.260" v="1774" actId="113"/>
         <pc:sldMkLst>
           <pc:docMk/>
           <pc:sldMk cId="2642426029" sldId="267"/>
@@ -448,7 +448,7 @@
           </ac:spMkLst>
         </pc:spChg>
         <pc:spChg chg="mod">
-          <ac:chgData name="Toby Donaldson" userId="2e6e5431-bb17-4c41-9985-d39c50d83c73" providerId="ADAL" clId="{F31BC264-820E-54C4-A6D1-F92AF9CC222E}" dt="2026-08-04T22:13:59.224" v="567" actId="20577"/>
+          <ac:chgData name="Toby Donaldson" userId="2e6e5431-bb17-4c41-9985-d39c50d83c73" providerId="ADAL" clId="{F31BC264-820E-54C4-A6D1-F92AF9CC222E}" dt="2026-08-04T22:53:51.260" v="1774" actId="113"/>
           <ac:spMkLst>
             <pc:docMk/>
             <pc:sldMk cId="2642426029" sldId="267"/>
@@ -489,7 +489,7 @@
         </pc:picChg>
       </pc:sldChg>
       <pc:sldChg chg="addSp modSp new mod">
-        <pc:chgData name="Toby Donaldson" userId="2e6e5431-bb17-4c41-9985-d39c50d83c73" providerId="ADAL" clId="{F31BC264-820E-54C4-A6D1-F92AF9CC222E}" dt="2026-08-04T22:03:58.953" v="442" actId="20577"/>
+        <pc:chgData name="Toby Donaldson" userId="2e6e5431-bb17-4c41-9985-d39c50d83c73" providerId="ADAL" clId="{F31BC264-820E-54C4-A6D1-F92AF9CC222E}" dt="2026-08-04T22:54:00.153" v="1775" actId="113"/>
         <pc:sldMkLst>
           <pc:docMk/>
           <pc:sldMk cId="1432864541" sldId="268"/>
@@ -503,7 +503,7 @@
           </ac:spMkLst>
         </pc:spChg>
         <pc:spChg chg="mod">
-          <ac:chgData name="Toby Donaldson" userId="2e6e5431-bb17-4c41-9985-d39c50d83c73" providerId="ADAL" clId="{F31BC264-820E-54C4-A6D1-F92AF9CC222E}" dt="2026-08-04T22:02:59.990" v="426" actId="20577"/>
+          <ac:chgData name="Toby Donaldson" userId="2e6e5431-bb17-4c41-9985-d39c50d83c73" providerId="ADAL" clId="{F31BC264-820E-54C4-A6D1-F92AF9CC222E}" dt="2026-08-04T22:54:00.153" v="1775" actId="113"/>
           <ac:spMkLst>
             <pc:docMk/>
             <pc:sldMk cId="1432864541" sldId="268"/>
@@ -520,13 +520,13 @@
         </pc:picChg>
       </pc:sldChg>
       <pc:sldChg chg="modSp add mod">
-        <pc:chgData name="Toby Donaldson" userId="2e6e5431-bb17-4c41-9985-d39c50d83c73" providerId="ADAL" clId="{F31BC264-820E-54C4-A6D1-F92AF9CC222E}" dt="2026-08-04T22:25:10.329" v="1767" actId="20577"/>
+        <pc:chgData name="Toby Donaldson" userId="2e6e5431-bb17-4c41-9985-d39c50d83c73" providerId="ADAL" clId="{F31BC264-820E-54C4-A6D1-F92AF9CC222E}" dt="2026-08-04T22:59:43.965" v="1850" actId="5793"/>
         <pc:sldMkLst>
           <pc:docMk/>
           <pc:sldMk cId="192062247" sldId="269"/>
         </pc:sldMkLst>
         <pc:spChg chg="mod">
-          <ac:chgData name="Toby Donaldson" userId="2e6e5431-bb17-4c41-9985-d39c50d83c73" providerId="ADAL" clId="{F31BC264-820E-54C4-A6D1-F92AF9CC222E}" dt="2026-08-04T22:25:10.329" v="1767" actId="20577"/>
+          <ac:chgData name="Toby Donaldson" userId="2e6e5431-bb17-4c41-9985-d39c50d83c73" providerId="ADAL" clId="{F31BC264-820E-54C4-A6D1-F92AF9CC222E}" dt="2026-08-04T22:59:43.965" v="1850" actId="5793"/>
           <ac:spMkLst>
             <pc:docMk/>
             <pc:sldMk cId="192062247" sldId="269"/>
@@ -3814,15 +3814,7 @@
           <a:p>
             <a:r>
               <a:rPr lang="en-US" dirty="0"/>
-              <a:t>A declarative </a:t>
-            </a:r>
-            <a:r>
-              <a:rPr lang="en-US"/>
-              <a:t>language based </a:t>
-            </a:r>
-            <a:r>
-              <a:rPr lang="en-US" dirty="0"/>
-              <a:t>on first-order logic</a:t>
+              <a:t>A declarative language based on first-order logic</a:t>
             </a:r>
           </a:p>
           <a:p>
@@ -4247,7 +4239,16 @@
             </a:pPr>
             <a:r>
               <a:rPr lang="en-US" dirty="0"/>
-              <a:t>A popular language for programs that reason with facts and rules.</a:t>
+              <a:t>A popular language for programs that reason with facts and rules</a:t>
+            </a:r>
+          </a:p>
+          <a:p>
+            <a:pPr marL="457200" lvl="1" indent="0">
+              <a:buNone/>
+            </a:pPr>
+            <a:r>
+              <a:rPr lang="en-US" dirty="0"/>
+              <a:t>	e.g. expert systems, question answering, theorem proving, planning, …</a:t>
             </a:r>
           </a:p>
           <a:p>
@@ -4536,7 +4537,7 @@
               <a:buAutoNum type="arabicPeriod"/>
             </a:pPr>
             <a:r>
-              <a:rPr lang="en-US" dirty="0"/>
+              <a:rPr lang="en-US" b="1" dirty="0"/>
               <a:t>The Godfather</a:t>
             </a:r>
           </a:p>
@@ -5009,7 +5010,7 @@
           <a:lstStyle/>
           <a:p>
             <a:r>
-              <a:rPr lang="en-CA" sz="2400" dirty="0"/>
+              <a:rPr lang="en-CA" sz="2400" b="1" dirty="0"/>
               <a:t>1. All in the Family</a:t>
             </a:r>
             <a:br>
